--- a/ppt_output/1.1_大模型基石——Transformer.pptx
+++ b/ppt_output/1.1_大模型基石——Transformer.pptx
@@ -16082,7 +16082,7 @@
                 <a:latin typeface="Arial" panose="020B0604020202020204" pitchFamily="34" charset="0"/>
                 <a:cs typeface="Arial" panose="020B0604020202020204" pitchFamily="34" charset="0"/>
               </a:rPr>
-              <a:t>深入讲解</a:t>
+              <a:t>本任务讲解</a:t>
             </a:r>
             <a:r>
               <a:rPr lang="en-US" altLang="zh-CN" dirty="0">
@@ -16110,7 +16110,7 @@
                 <a:latin typeface="Arial" panose="020B0604020202020204" pitchFamily="34" charset="0"/>
                 <a:cs typeface="Arial" panose="020B0604020202020204" pitchFamily="34" charset="0"/>
               </a:rPr>
-              <a:t>解码器结构、自注意力和多头注意力的原理与实现。通过实践掌握简化</a:t>
+              <a:t>解码器结构、自注意力和多头注意力机制。实践环节让读者掌握简化版</a:t>
             </a:r>
             <a:r>
               <a:rPr lang="en-US" altLang="zh-CN" dirty="0">
@@ -16124,7 +16124,35 @@
                 <a:latin typeface="Arial" panose="020B0604020202020204" pitchFamily="34" charset="0"/>
                 <a:cs typeface="Arial" panose="020B0604020202020204" pitchFamily="34" charset="0"/>
               </a:rPr>
-              <a:t>搭建、注意力可视化及预训练模型特征提取。其并行计算和全局上下文建模优势成为大语言模型基础。</a:t>
+              <a:t>搭建和注意力可视化。</a:t>
+            </a:r>
+            <a:r>
+              <a:rPr lang="en-US" altLang="zh-CN" dirty="0">
+                <a:latin typeface="Arial" panose="020B0604020202020204" pitchFamily="34" charset="0"/>
+                <a:cs typeface="Arial" panose="020B0604020202020204" pitchFamily="34" charset="0"/>
+              </a:rPr>
+              <a:t>Transformer</a:t>
+            </a:r>
+            <a:r>
+              <a:rPr lang="zh-CN" altLang="en-US" dirty="0">
+                <a:latin typeface="Arial" panose="020B0604020202020204" pitchFamily="34" charset="0"/>
+                <a:cs typeface="Arial" panose="020B0604020202020204" pitchFamily="34" charset="0"/>
+              </a:rPr>
+              <a:t>的并行计算和全局建模能力使其成为大语言模型基础，理解其原理对掌握</a:t>
+            </a:r>
+            <a:r>
+              <a:rPr lang="en-US" altLang="zh-CN" dirty="0">
+                <a:latin typeface="Arial" panose="020B0604020202020204" pitchFamily="34" charset="0"/>
+                <a:cs typeface="Arial" panose="020B0604020202020204" pitchFamily="34" charset="0"/>
+              </a:rPr>
+              <a:t>NLP</a:t>
+            </a:r>
+            <a:r>
+              <a:rPr lang="zh-CN" altLang="en-US" dirty="0">
+                <a:latin typeface="Arial" panose="020B0604020202020204" pitchFamily="34" charset="0"/>
+                <a:cs typeface="Arial" panose="020B0604020202020204" pitchFamily="34" charset="0"/>
+              </a:rPr>
+              <a:t>技术至关重要。</a:t>
             </a:r>
             <a:endParaRPr lang="zh-CN" altLang="en-US" dirty="0">
               <a:latin typeface="Arial" panose="020B0604020202020204" pitchFamily="34" charset="0"/>
@@ -16762,30 +16790,12 @@
             <a:r>
               <a:rPr lang="zh-CN" sz="2000" dirty="0">
                 <a:latin typeface="Arial" panose="020B0604020202020204" pitchFamily="34" charset="0"/>
-                <a:cs typeface="Arial" panose="020B0604020202020204" pitchFamily="34" charset="0"/>
                 <a:sym typeface="+mn-ea"/>
               </a:rPr>
-              <a:t>编码器</a:t>
+              <a:t>注意力机制计算过程</a:t>
             </a:r>
-            <a:r>
-              <a:rPr lang="en-US" altLang="zh-CN" sz="2000" dirty="0">
-                <a:latin typeface="Arial" panose="020B0604020202020204" pitchFamily="34" charset="0"/>
-                <a:cs typeface="Arial" panose="020B0604020202020204" pitchFamily="34" charset="0"/>
-                <a:sym typeface="+mn-ea"/>
-              </a:rPr>
-              <a:t>-</a:t>
-            </a:r>
-            <a:r>
-              <a:rPr lang="zh-CN" altLang="en-US" sz="2000" dirty="0">
-                <a:latin typeface="Arial" panose="020B0604020202020204" pitchFamily="34" charset="0"/>
-                <a:cs typeface="Arial" panose="020B0604020202020204" pitchFamily="34" charset="0"/>
-                <a:sym typeface="+mn-ea"/>
-              </a:rPr>
-              <a:t>解码器协同工作</a:t>
-            </a:r>
-            <a:endParaRPr lang="zh-CN" altLang="en-US" sz="2000" dirty="0">
+            <a:endParaRPr lang="zh-CN" sz="2000" dirty="0">
               <a:latin typeface="Arial" panose="020B0604020202020204" pitchFamily="34" charset="0"/>
-              <a:cs typeface="Arial" panose="020B0604020202020204" pitchFamily="34" charset="0"/>
               <a:sym typeface="+mn-ea"/>
             </a:endParaRPr>
           </a:p>
@@ -16863,7 +16873,7 @@
               <a:rPr lang="zh-CN" sz="2000" dirty="0">
                 <a:latin typeface="Arial" panose="020B0604020202020204" pitchFamily="34" charset="0"/>
               </a:rPr>
-              <a:t>多头注意力机制实现</a:t>
+              <a:t>多头注意力机制</a:t>
             </a:r>
             <a:endParaRPr lang="zh-CN" sz="2000" dirty="0">
               <a:latin typeface="Arial" panose="020B0604020202020204" pitchFamily="34" charset="0"/>
@@ -16904,7 +16914,7 @@
                 <a:latin typeface="Arial" panose="020B0604020202020204" pitchFamily="34" charset="0"/>
                 <a:sym typeface="+mn-ea"/>
               </a:rPr>
-              <a:t>注意力权重可视化</a:t>
+              <a:t>模型实现与测试</a:t>
             </a:r>
             <a:endParaRPr lang="zh-CN" sz="2000" dirty="0">
               <a:latin typeface="Arial" panose="020B0604020202020204" pitchFamily="34" charset="0"/>
@@ -16944,30 +16954,12 @@
             <a:r>
               <a:rPr lang="zh-CN" sz="2000" dirty="0">
                 <a:latin typeface="Arial" panose="020B0604020202020204" pitchFamily="34" charset="0"/>
-                <a:cs typeface="Arial" panose="020B0604020202020204" pitchFamily="34" charset="0"/>
                 <a:sym typeface="+mn-ea"/>
               </a:rPr>
-              <a:t>简化模型</a:t>
+              <a:t>可视化分析方法</a:t>
             </a:r>
-            <a:r>
-              <a:rPr lang="en-US" altLang="zh-CN" sz="2000" dirty="0">
-                <a:latin typeface="Arial" panose="020B0604020202020204" pitchFamily="34" charset="0"/>
-                <a:cs typeface="Arial" panose="020B0604020202020204" pitchFamily="34" charset="0"/>
-                <a:sym typeface="+mn-ea"/>
-              </a:rPr>
-              <a:t>PyTorch</a:t>
-            </a:r>
-            <a:r>
-              <a:rPr lang="zh-CN" altLang="en-US" sz="2000" dirty="0">
-                <a:latin typeface="Arial" panose="020B0604020202020204" pitchFamily="34" charset="0"/>
-                <a:cs typeface="Arial" panose="020B0604020202020204" pitchFamily="34" charset="0"/>
-                <a:sym typeface="+mn-ea"/>
-              </a:rPr>
-              <a:t>实现</a:t>
-            </a:r>
-            <a:endParaRPr lang="zh-CN" altLang="en-US" sz="2000" dirty="0">
+            <a:endParaRPr lang="zh-CN" sz="2000" dirty="0">
               <a:latin typeface="Arial" panose="020B0604020202020204" pitchFamily="34" charset="0"/>
-              <a:cs typeface="Arial" panose="020B0604020202020204" pitchFamily="34" charset="0"/>
               <a:sym typeface="+mn-ea"/>
             </a:endParaRPr>
           </a:p>
@@ -18762,7 +18754,7 @@
                 <a:cs typeface="微软雅黑" panose="020B0503020204020204" pitchFamily="34" charset="-122"/>
                 <a:sym typeface="+mn-ea"/>
               </a:rPr>
-              <a:t>实现</a:t>
+              <a:t>实现简化</a:t>
             </a:r>
             <a:r>
               <a:rPr lang="en-US" altLang="zh-CN" sz="2000" dirty="0">
@@ -18780,7 +18772,7 @@
                 <a:cs typeface="微软雅黑" panose="020B0503020204020204" pitchFamily="34" charset="-122"/>
                 <a:sym typeface="+mn-ea"/>
               </a:rPr>
-              <a:t>编码器层，含自注意力和前馈网络，测试输入输出维度。用</a:t>
+              <a:t>编码器层，包含自注意力和前馈网络，测试输入输出维度。用</a:t>
             </a:r>
             <a:r>
               <a:rPr lang="en-US" altLang="zh-CN" sz="2000" dirty="0">
@@ -18816,25 +18808,7 @@
                 <a:cs typeface="微软雅黑" panose="020B0503020204020204" pitchFamily="34" charset="-122"/>
                 <a:sym typeface="+mn-ea"/>
               </a:rPr>
-              <a:t>注意力权重，观察动词</a:t>
-            </a:r>
-            <a:r>
-              <a:rPr lang="en-US" altLang="zh-CN" sz="2000" dirty="0">
-                <a:latin typeface="微软雅黑" panose="020B0503020204020204" pitchFamily="34" charset="-122"/>
-                <a:ea typeface="微软雅黑" panose="020B0503020204020204" pitchFamily="34" charset="-122"/>
-                <a:cs typeface="微软雅黑" panose="020B0503020204020204" pitchFamily="34" charset="-122"/>
-                <a:sym typeface="+mn-ea"/>
-              </a:rPr>
-              <a:t>"forgot"</a:t>
-            </a:r>
-            <a:r>
-              <a:rPr lang="zh-CN" altLang="en-US" sz="2000" dirty="0">
-                <a:latin typeface="微软雅黑" panose="020B0503020204020204" pitchFamily="34" charset="-122"/>
-                <a:ea typeface="微软雅黑" panose="020B0503020204020204" pitchFamily="34" charset="-122"/>
-                <a:cs typeface="微软雅黑" panose="020B0503020204020204" pitchFamily="34" charset="-122"/>
-                <a:sym typeface="+mn-ea"/>
-              </a:rPr>
-              <a:t>的关注对象。</a:t>
+              <a:t>注意力权重，观察句子中关键动词的关注对象。</a:t>
             </a:r>
             <a:endParaRPr lang="zh-CN" altLang="en-US" sz="2000" dirty="0">
               <a:latin typeface="微软雅黑" panose="020B0503020204020204" pitchFamily="34" charset="-122"/>
@@ -18949,7 +18923,25 @@
                 <a:cs typeface="微软雅黑" panose="020B0503020204020204" pitchFamily="34" charset="-122"/>
                 <a:sym typeface="+mn-ea"/>
               </a:rPr>
-              <a:t>实现编码器层验证模型维度，使用</a:t>
+              <a:t>实践掌握简化版</a:t>
+            </a:r>
+            <a:r>
+              <a:rPr lang="en-US" altLang="zh-CN" sz="2000" dirty="0">
+                <a:latin typeface="微软雅黑" panose="020B0503020204020204" pitchFamily="34" charset="-122"/>
+                <a:ea typeface="微软雅黑" panose="020B0503020204020204" pitchFamily="34" charset="-122"/>
+                <a:cs typeface="微软雅黑" panose="020B0503020204020204" pitchFamily="34" charset="-122"/>
+                <a:sym typeface="+mn-ea"/>
+              </a:rPr>
+              <a:t>Transformer</a:t>
+            </a:r>
+            <a:r>
+              <a:rPr lang="zh-CN" altLang="en-US" sz="2000" dirty="0">
+                <a:latin typeface="微软雅黑" panose="020B0503020204020204" pitchFamily="34" charset="-122"/>
+                <a:ea typeface="微软雅黑" panose="020B0503020204020204" pitchFamily="34" charset="-122"/>
+                <a:cs typeface="微软雅黑" panose="020B0503020204020204" pitchFamily="34" charset="-122"/>
+                <a:sym typeface="+mn-ea"/>
+              </a:rPr>
+              <a:t>编码器层的搭建，理解自注意力机制和前馈神经网络的工作原理；使用</a:t>
             </a:r>
             <a:r>
               <a:rPr lang="en-US" altLang="zh-CN" sz="2000" dirty="0">
@@ -18967,7 +18959,7 @@
                 <a:cs typeface="微软雅黑" panose="020B0503020204020204" pitchFamily="34" charset="-122"/>
                 <a:sym typeface="+mn-ea"/>
               </a:rPr>
-              <a:t>可视化</a:t>
+              <a:t>工具对</a:t>
             </a:r>
             <a:r>
               <a:rPr lang="en-US" altLang="zh-CN" sz="2000" dirty="0">
@@ -18985,25 +18977,7 @@
                 <a:cs typeface="微软雅黑" panose="020B0503020204020204" pitchFamily="34" charset="-122"/>
                 <a:sym typeface="+mn-ea"/>
               </a:rPr>
-              <a:t>注意力权重，分析动词</a:t>
-            </a:r>
-            <a:r>
-              <a:rPr lang="en-US" altLang="zh-CN" sz="2000" dirty="0">
-                <a:latin typeface="微软雅黑" panose="020B0503020204020204" pitchFamily="34" charset="-122"/>
-                <a:ea typeface="微软雅黑" panose="020B0503020204020204" pitchFamily="34" charset="-122"/>
-                <a:cs typeface="微软雅黑" panose="020B0503020204020204" pitchFamily="34" charset="-122"/>
-                <a:sym typeface="+mn-ea"/>
-              </a:rPr>
-              <a:t>forgot</a:t>
-            </a:r>
-            <a:r>
-              <a:rPr lang="zh-CN" altLang="en-US" sz="2000" dirty="0">
-                <a:latin typeface="微软雅黑" panose="020B0503020204020204" pitchFamily="34" charset="-122"/>
-                <a:ea typeface="微软雅黑" panose="020B0503020204020204" pitchFamily="34" charset="-122"/>
-                <a:cs typeface="微软雅黑" panose="020B0503020204020204" pitchFamily="34" charset="-122"/>
-                <a:sym typeface="+mn-ea"/>
-              </a:rPr>
-              <a:t>与句子各词间的关联强度，深入理解自注意力机制如何捕捉长距离依赖关系。</a:t>
+              <a:t>模型进行注意力权重可视化，直观观察模型如何关注句子中的关键信息，验证理论学习的有效性。</a:t>
             </a:r>
             <a:endParaRPr lang="zh-CN" altLang="en-US" sz="2000" dirty="0">
               <a:latin typeface="微软雅黑" panose="020B0503020204020204" pitchFamily="34" charset="-122"/>
@@ -20188,7 +20162,7 @@
                 <a:cs typeface="微软雅黑" panose="020B0503020204020204" pitchFamily="34" charset="-122"/>
                 <a:sym typeface="+mn-ea"/>
               </a:rPr>
-              <a:t>以《山海经》神兽白泽为引，阐述传统机器翻译的局限性。</a:t>
+              <a:t>从《山海经》白泽神兽案例看机器理解中文语义的演进：传统机器翻译词不达意，</a:t>
             </a:r>
             <a:r>
               <a:rPr lang="en-US" altLang="zh-CN" dirty="0">
@@ -20206,7 +20180,7 @@
                 <a:cs typeface="微软雅黑" panose="020B0503020204020204" pitchFamily="34" charset="-122"/>
                 <a:sym typeface="+mn-ea"/>
               </a:rPr>
-              <a:t>通过注意力机制通览全文、把握上下文关联，中文分词与词嵌入技术将汉字映射至高维向量空间，指令数据赋予模型认知能力，使其理解指令、举一反三，实现语义理解。</a:t>
+              <a:t>通过注意力机制实现上下文关联；大模型依赖高质量中文数据集进行分词与向量化，将汉字映射至高维向量空间实现语义理解；最终通过指令数据对齐训练，赋予模型指令遵循与举一反三能力。</a:t>
             </a:r>
             <a:endParaRPr lang="zh-CN" altLang="en-US" dirty="0">
               <a:latin typeface="微软雅黑" panose="020B0503020204020204" pitchFamily="34" charset="-122"/>
@@ -20278,7 +20252,7 @@
                 <a:ea typeface="微软雅黑" panose="020B0503020204020204" pitchFamily="34" charset="-122"/>
                 <a:cs typeface="微软雅黑" panose="020B0503020204020204" pitchFamily="34" charset="-122"/>
               </a:rPr>
-              <a:t>机器如何真正理解白泽这类复杂概念？</a:t>
+              <a:t>计算机如何将无意义字符编码转化为可理解的语义？</a:t>
             </a:r>
             <a:r>
               <a:rPr lang="en-US" altLang="zh-CN" sz="2000" dirty="0">
@@ -20295,7 +20269,7 @@
                 <a:ea typeface="微软雅黑" panose="020B0503020204020204" pitchFamily="34" charset="-122"/>
                 <a:cs typeface="微软雅黑" panose="020B0503020204020204" pitchFamily="34" charset="-122"/>
               </a:rPr>
-              <a:t>如何超越传统逐字翻译的局限？</a:t>
+              <a:t>如何通过注意力机制实现跨句关联？</a:t>
             </a:r>
             <a:r>
               <a:rPr lang="en-US" altLang="zh-CN" sz="2000" dirty="0">
@@ -20312,7 +20286,7 @@
                 <a:ea typeface="微软雅黑" panose="020B0503020204020204" pitchFamily="34" charset="-122"/>
                 <a:cs typeface="微软雅黑" panose="020B0503020204020204" pitchFamily="34" charset="-122"/>
               </a:rPr>
-              <a:t>中文分词与向量化如何实现语义关联？</a:t>
+              <a:t>中文大模型的认知深度取决于哪些关键因素？</a:t>
             </a:r>
             <a:endParaRPr lang="zh-CN" altLang="en-US" sz="2000" dirty="0">
               <a:latin typeface="微软雅黑" panose="020B0503020204020204" pitchFamily="34" charset="-122"/>
@@ -22813,7 +22787,7 @@
                 <a:ea typeface="微软雅黑" panose="020B0503020204020204" pitchFamily="34" charset="-122"/>
                 <a:cs typeface="微软雅黑" panose="020B0503020204020204" pitchFamily="34" charset="-122"/>
               </a:rPr>
-              <a:t>整体架构，明确编码器与解码器功能差异；掌握注意力机制概念与计算，使用</a:t>
+              <a:t>整体架构，明确编码器和解码器的功能与差异；掌握注意力机制概念和计算过程，使用</a:t>
             </a:r>
             <a:r>
               <a:rPr lang="en-US" altLang="zh-CN" dirty="0" smtClean="0">
@@ -22845,7 +22819,7 @@
                 <a:ea typeface="微软雅黑" panose="020B0503020204020204" pitchFamily="34" charset="-122"/>
                 <a:cs typeface="微软雅黑" panose="020B0503020204020204" pitchFamily="34" charset="-122"/>
               </a:rPr>
-              <a:t>实现简化</a:t>
+              <a:t>实现简化版</a:t>
             </a:r>
             <a:r>
               <a:rPr lang="en-US" altLang="zh-CN" dirty="0" smtClean="0">
@@ -22861,7 +22835,7 @@
                 <a:ea typeface="微软雅黑" panose="020B0503020204020204" pitchFamily="34" charset="-122"/>
                 <a:cs typeface="微软雅黑" panose="020B0503020204020204" pitchFamily="34" charset="-122"/>
               </a:rPr>
-              <a:t>验证输出。</a:t>
+              <a:t>并验证输出。</a:t>
             </a:r>
             <a:endParaRPr lang="zh-CN" altLang="en-US" dirty="0" smtClean="0">
               <a:latin typeface="微软雅黑" panose="020B0503020204020204" pitchFamily="34" charset="-122"/>
@@ -23238,7 +23212,7 @@
                 <a:cs typeface="微软雅黑" panose="020B0503020204020204" pitchFamily="34" charset="-122"/>
                 <a:sym typeface="+mn-ea"/>
               </a:rPr>
-              <a:t>掌握注意力机制的基本概念</a:t>
+              <a:t>明确编码器和解码器各自的功能与差异</a:t>
             </a:r>
             <a:endParaRPr lang="zh-CN" dirty="0">
               <a:latin typeface="微软雅黑" panose="020B0503020204020204" pitchFamily="34" charset="-122"/>
@@ -23258,6 +23232,52 @@
         <p:spPr>
           <a:xfrm>
             <a:off x="3006000" y="4503600"/>
+            <a:ext cx="8279765" cy="468630"/>
+          </a:xfrm>
+          <a:prstGeom prst="rect">
+            <a:avLst/>
+          </a:prstGeom>
+          <a:noFill/>
+        </p:spPr>
+        <p:txBody>
+          <a:bodyPr wrap="square" rtlCol="0">
+            <a:noAutofit/>
+          </a:bodyPr>
+          <a:p>
+            <a:pPr marL="800100" lvl="1" indent="-342900" algn="l" fontAlgn="auto">
+              <a:lnSpc>
+                <a:spcPct val="150000"/>
+              </a:lnSpc>
+              <a:buFont typeface="Wingdings" panose="05000000000000000000" pitchFamily="2" charset="2"/>
+              <a:buChar char="l"/>
+            </a:pPr>
+            <a:r>
+              <a:rPr lang="zh-CN" dirty="0">
+                <a:latin typeface="微软雅黑" panose="020B0503020204020204" pitchFamily="34" charset="-122"/>
+                <a:ea typeface="微软雅黑" panose="020B0503020204020204" pitchFamily="34" charset="-122"/>
+                <a:cs typeface="微软雅黑" panose="020B0503020204020204" pitchFamily="34" charset="-122"/>
+                <a:sym typeface="+mn-ea"/>
+              </a:rPr>
+              <a:t>掌握注意力机制的基本概念和计算过程</a:t>
+            </a:r>
+            <a:endParaRPr lang="zh-CN" dirty="0">
+              <a:latin typeface="微软雅黑" panose="020B0503020204020204" pitchFamily="34" charset="-122"/>
+              <a:ea typeface="微软雅黑" panose="020B0503020204020204" pitchFamily="34" charset="-122"/>
+              <a:cs typeface="微软雅黑" panose="020B0503020204020204" pitchFamily="34" charset="-122"/>
+              <a:sym typeface="+mn-ea"/>
+            </a:endParaRPr>
+          </a:p>
+        </p:txBody>
+      </p:sp>
+      <p:sp>
+        <p:nvSpPr>
+          <p:cNvPr id="16" name="文本框 15"/>
+          <p:cNvSpPr txBox="1"/>
+          <p:nvPr/>
+        </p:nvSpPr>
+        <p:spPr>
+          <a:xfrm>
+            <a:off x="3006090" y="4971600"/>
             <a:ext cx="8279765" cy="468630"/>
           </a:xfrm>
           <a:prstGeom prst="rect">
@@ -23315,13 +23335,13 @@
       </p:sp>
       <p:sp>
         <p:nvSpPr>
-          <p:cNvPr id="16" name="文本框 15"/>
+          <p:cNvPr id="17" name="文本框 16"/>
           <p:cNvSpPr txBox="1"/>
           <p:nvPr/>
         </p:nvSpPr>
         <p:spPr>
           <a:xfrm>
-            <a:off x="3006090" y="4971600"/>
+            <a:off x="3006000" y="5439600"/>
             <a:ext cx="8279765" cy="468630"/>
           </a:xfrm>
           <a:prstGeom prst="rect">
@@ -23366,7 +23386,7 @@
                 <a:cs typeface="微软雅黑" panose="020B0503020204020204" pitchFamily="34" charset="-122"/>
                 <a:sym typeface="+mn-ea"/>
               </a:rPr>
-              <a:t>实现简化版</a:t>
+              <a:t>实现一个简化版</a:t>
             </a:r>
             <a:r>
               <a:rPr lang="en-US" altLang="zh-CN" dirty="0">
@@ -23378,52 +23398,6 @@
               <a:t>Transformer</a:t>
             </a:r>
             <a:endParaRPr lang="en-US" altLang="zh-CN" dirty="0">
-              <a:latin typeface="微软雅黑" panose="020B0503020204020204" pitchFamily="34" charset="-122"/>
-              <a:ea typeface="微软雅黑" panose="020B0503020204020204" pitchFamily="34" charset="-122"/>
-              <a:cs typeface="微软雅黑" panose="020B0503020204020204" pitchFamily="34" charset="-122"/>
-              <a:sym typeface="+mn-ea"/>
-            </a:endParaRPr>
-          </a:p>
-        </p:txBody>
-      </p:sp>
-      <p:sp>
-        <p:nvSpPr>
-          <p:cNvPr id="17" name="文本框 16"/>
-          <p:cNvSpPr txBox="1"/>
-          <p:nvPr/>
-        </p:nvSpPr>
-        <p:spPr>
-          <a:xfrm>
-            <a:off x="3006000" y="5439600"/>
-            <a:ext cx="8279765" cy="468630"/>
-          </a:xfrm>
-          <a:prstGeom prst="rect">
-            <a:avLst/>
-          </a:prstGeom>
-          <a:noFill/>
-        </p:spPr>
-        <p:txBody>
-          <a:bodyPr wrap="square" rtlCol="0">
-            <a:noAutofit/>
-          </a:bodyPr>
-          <a:p>
-            <a:pPr marL="800100" lvl="1" indent="-342900" algn="l" fontAlgn="auto">
-              <a:lnSpc>
-                <a:spcPct val="150000"/>
-              </a:lnSpc>
-              <a:buFont typeface="Wingdings" panose="05000000000000000000" pitchFamily="2" charset="2"/>
-              <a:buChar char="l"/>
-            </a:pPr>
-            <a:r>
-              <a:rPr lang="zh-CN" dirty="0">
-                <a:latin typeface="微软雅黑" panose="020B0503020204020204" pitchFamily="34" charset="-122"/>
-                <a:ea typeface="微软雅黑" panose="020B0503020204020204" pitchFamily="34" charset="-122"/>
-                <a:cs typeface="微软雅黑" panose="020B0503020204020204" pitchFamily="34" charset="-122"/>
-                <a:sym typeface="+mn-ea"/>
-              </a:rPr>
-              <a:t>验证模型输出</a:t>
-            </a:r>
-            <a:endParaRPr lang="zh-CN" dirty="0">
               <a:latin typeface="微软雅黑" panose="020B0503020204020204" pitchFamily="34" charset="-122"/>
               <a:ea typeface="微软雅黑" panose="020B0503020204020204" pitchFamily="34" charset="-122"/>
               <a:cs typeface="微软雅黑" panose="020B0503020204020204" pitchFamily="34" charset="-122"/>
@@ -27100,7 +27074,7 @@
                 <a:cs typeface="Times New Roman" panose="02020603050405020304" charset="0"/>
                 <a:sym typeface="+mn-ea"/>
               </a:rPr>
-              <a:t>区分编码器和解码器的功能</a:t>
+              <a:t>能够区分编码器和解码器的功能，并理解其协同工作机制</a:t>
             </a:r>
             <a:endParaRPr lang="zh-CN" dirty="0" smtClean="0">
               <a:latin typeface="Arial" panose="020B0604020202020204" pitchFamily="34" charset="0"/>
@@ -27160,7 +27134,7 @@
                 <a:cs typeface="Arial" panose="020B0604020202020204" pitchFamily="34" charset="0"/>
                 <a:sym typeface="+mn-ea"/>
               </a:rPr>
-              <a:t>模型的基本原理</a:t>
+              <a:t>基本原理及其在大模型架构中的核心地位。</a:t>
             </a:r>
             <a:endParaRPr lang="zh-CN" altLang="en-US" dirty="0" smtClean="0">
               <a:latin typeface="Arial" panose="020B0604020202020204" pitchFamily="34" charset="0"/>
@@ -27204,7 +27178,7 @@
                 <a:cs typeface="Times New Roman" panose="02020603050405020304" charset="0"/>
                 <a:sym typeface="+mn-ea"/>
               </a:rPr>
-              <a:t>描述注意力机制的作用并进行可视化分析</a:t>
+              <a:t>能够描述注意力机制的作用及其实现方式，并进行可视化分析</a:t>
             </a:r>
             <a:endParaRPr lang="zh-CN" dirty="0" smtClean="0">
               <a:latin typeface="Arial" panose="020B0604020202020204" pitchFamily="34" charset="0"/>
@@ -27248,7 +27222,7 @@
                 <a:cs typeface="Arial" panose="020B0604020202020204" pitchFamily="34" charset="0"/>
                 <a:sym typeface="+mn-ea"/>
               </a:rPr>
-              <a:t>搭建简单的</a:t>
+              <a:t>能够搭建简单的</a:t>
             </a:r>
             <a:r>
               <a:rPr lang="en-US" altLang="zh-CN" dirty="0" smtClean="0">
@@ -27264,7 +27238,7 @@
                 <a:cs typeface="Arial" panose="020B0604020202020204" pitchFamily="34" charset="0"/>
                 <a:sym typeface="+mn-ea"/>
               </a:rPr>
-              <a:t>模型</a:t>
+              <a:t>模型，测试模型输入与输出</a:t>
             </a:r>
             <a:endParaRPr lang="zh-CN" altLang="en-US" dirty="0" smtClean="0">
               <a:latin typeface="Arial" panose="020B0604020202020204" pitchFamily="34" charset="0"/>
@@ -27308,7 +27282,7 @@
                 <a:cs typeface="Arial" panose="020B0604020202020204" pitchFamily="34" charset="0"/>
                 <a:sym typeface="+mn-ea"/>
               </a:rPr>
-              <a:t>重点：自注意力机制原理与</a:t>
+              <a:t>重点：编码器</a:t>
             </a:r>
             <a:r>
               <a:rPr lang="en-US" altLang="zh-CN" dirty="0" smtClean="0">
@@ -27316,7 +27290,7 @@
                 <a:cs typeface="Arial" panose="020B0604020202020204" pitchFamily="34" charset="0"/>
                 <a:sym typeface="+mn-ea"/>
               </a:rPr>
-              <a:t>PyTorch</a:t>
+              <a:t>-</a:t>
             </a:r>
             <a:r>
               <a:rPr lang="zh-CN" altLang="en-US" dirty="0" smtClean="0">
@@ -27324,7 +27298,7 @@
                 <a:cs typeface="Arial" panose="020B0604020202020204" pitchFamily="34" charset="0"/>
                 <a:sym typeface="+mn-ea"/>
               </a:rPr>
-              <a:t>实现</a:t>
+              <a:t>解码器结构、自注意力机制与多头注意力</a:t>
             </a:r>
             <a:endParaRPr lang="zh-CN" altLang="en-US" dirty="0" smtClean="0">
               <a:latin typeface="Arial" panose="020B0604020202020204" pitchFamily="34" charset="0"/>
@@ -27365,30 +27339,14 @@
             <a:r>
               <a:rPr lang="zh-CN" altLang="en-US" dirty="0" smtClean="0">
                 <a:latin typeface="Arial" panose="020B0604020202020204" pitchFamily="34" charset="0"/>
-                <a:cs typeface="Arial" panose="020B0604020202020204" pitchFamily="34" charset="0"/>
+                <a:cs typeface="Times New Roman" panose="02020603050405020304" charset="0"/>
                 <a:sym typeface="+mn-ea"/>
               </a:rPr>
-              <a:t>难点：编码器</a:t>
-            </a:r>
-            <a:r>
-              <a:rPr lang="en-US" altLang="zh-CN" dirty="0" smtClean="0">
-                <a:latin typeface="Arial" panose="020B0604020202020204" pitchFamily="34" charset="0"/>
-                <a:cs typeface="Arial" panose="020B0604020202020204" pitchFamily="34" charset="0"/>
-                <a:sym typeface="+mn-ea"/>
-              </a:rPr>
-              <a:t>-</a:t>
-            </a:r>
-            <a:r>
-              <a:rPr lang="zh-CN" altLang="en-US" dirty="0" smtClean="0">
-                <a:latin typeface="Arial" panose="020B0604020202020204" pitchFamily="34" charset="0"/>
-                <a:cs typeface="Arial" panose="020B0604020202020204" pitchFamily="34" charset="0"/>
-                <a:sym typeface="+mn-ea"/>
-              </a:rPr>
-              <a:t>解码器协同工作机制理解</a:t>
+              <a:t>难点：注意力机制的计算过程与可视化分析</a:t>
             </a:r>
             <a:endParaRPr lang="zh-CN" altLang="en-US" dirty="0" smtClean="0">
               <a:latin typeface="Arial" panose="020B0604020202020204" pitchFamily="34" charset="0"/>
-              <a:cs typeface="Arial" panose="020B0604020202020204" pitchFamily="34" charset="0"/>
+              <a:cs typeface="Times New Roman" panose="02020603050405020304" charset="0"/>
               <a:sym typeface="+mn-ea"/>
             </a:endParaRPr>
           </a:p>
